--- a/presentations/technical_deck.pptx
+++ b/presentations/technical_deck.pptx
@@ -3391,7 +3391,7 @@
                   <a:srgbClr val="14223C"/>
                 </a:solidFill>
               </a:rPr>
-              <a:t>; small sellers = 5.9% of catalogue, </a:t>
+              <a:t>; small sellers = 5.9% of catalog, </a:t>
             </a:r>
             <a:r>
               <a:rPr b="1" sz="1400">
@@ -3919,7 +3919,7 @@
                   <a:srgbClr val="14223C"/>
                 </a:solidFill>
               </a:rPr>
-              <a:t> shared with the audit notebook); cold-start routing built in; Docker image bakes data + artefacts</a:t>
+              <a:t> shared with the audit notebook); cold-start routing built in; Docker image bakes data + artifacts</a:t>
             </a:r>
           </a:p>
           <a:p>
@@ -4259,7 +4259,7 @@
                   <a:srgbClr val="14223C"/>
                 </a:solidFill>
               </a:rPr>
-              <a:t>Repurchase drives most personalisation hits; CF is starved at 1.04 products/order</a:t>
+              <a:t>Repurchase drives most personalization hits; CF is starved at 1.04 products/order</a:t>
             </a:r>
           </a:p>
           <a:p>
@@ -4345,7 +4345,7 @@
                   <a:srgbClr val="14223C"/>
                 </a:solidFill>
               </a:rPr>
-              <a:t> seeded runs, pinned configs, committed artefacts, one-command serving.</a:t>
+              <a:t> seeded runs, pinned configs, committed artifacts, one-command serving.</a:t>
             </a:r>
           </a:p>
         </p:txBody>
@@ -5279,7 +5279,7 @@
                   <a:srgbClr val="14223C"/>
                 </a:solidFill>
               </a:rPr>
-              <a:t>Prices heavy-tailed (median R$75, p99 ≈ R$890), so price features are winsorised</a:t>
+              <a:t>Prices heavy-tailed (median R$75, p99 ≈ R$890), so price features are winsorized</a:t>
             </a:r>
           </a:p>
           <a:p>
@@ -8689,7 +8689,7 @@
                   <a:srgbClr val="14223C"/>
                 </a:solidFill>
               </a:rPr>
-              <a:t>TPR gap 0.194, favouring the Northeast</a:t>
+              <a:t>TPR gap 0.194, favoring the Northeast</a:t>
             </a:r>
             <a:r>
               <a:rPr sz="1250">
@@ -8765,7 +8765,7 @@
                   <a:srgbClr val="14223C"/>
                 </a:solidFill>
               </a:rPr>
-              <a:t>Fairness-through-unawareness buys nothing: dropping geography features costs accuracy (AUC 0.723 to 0.713) while gaps barely move; the τ-fixed TPR-gap widening (0.194 to 0.292) is partly a calibration artefact; freight &amp; price encode geography anyway</a:t>
+              <a:t>Fairness-through-unawareness buys nothing: dropping geography features costs accuracy (AUC 0.723 to 0.713) while gaps barely move; the τ-fixed TPR-gap widening (0.194 to 0.292) is partly a calibration artifact; freight &amp; price encode geography anyway</a:t>
             </a:r>
           </a:p>
         </p:txBody>
